--- a/Final Project presentation.pptx
+++ b/Final Project presentation.pptx
@@ -118,6 +118,7 @@
 <file path=ppt/revisionInfo.xml><?xml version="1.0" encoding="utf-8"?>
 <p1510:revInfo xmlns:a="http://schemas.openxmlformats.org/drawingml/2006/main" xmlns:r="http://schemas.openxmlformats.org/officeDocument/2006/relationships" xmlns:p1510="http://schemas.microsoft.com/office/powerpoint/2015/10/main">
   <p1510:revLst>
+    <p1510:client id="{15308066-BE02-4BBA-AC69-AE90D2838110}" v="6" dt="2026-07-05T12:39:33.838"/>
     <p1510:client id="{93A98160-B1A6-4CC1-9928-96790D6FFDB4}" v="1703" dt="2026-07-05T12:27:19.134"/>
   </p1510:revLst>
 </p1510:revInfo>
@@ -3680,7 +3681,15 @@
             </a:r>
             <a:r>
               <a:rPr lang="it-IT" sz="2400" dirty="0"/>
-              <a:t> importante </a:t>
+              <a:t> </a:t>
+            </a:r>
+            <a:r>
+              <a:rPr lang="it-IT" sz="2400" dirty="0" err="1"/>
+              <a:t>important</a:t>
+            </a:r>
+            <a:r>
+              <a:rPr lang="it-IT" sz="2400" dirty="0"/>
+              <a:t> </a:t>
             </a:r>
             <a:r>
               <a:rPr lang="it-IT" sz="2400" dirty="0" err="1"/>
@@ -3694,6 +3703,7 @@
               <a:rPr lang="it-IT" sz="2400" dirty="0" err="1"/>
               <a:t>were</a:t>
             </a:r>
+            <a:endParaRPr lang="it-IT" sz="2400" dirty="0"/>
           </a:p>
           <a:p>
             <a:pPr marL="342900" indent="-342900">
@@ -3713,7 +3723,7 @@
             </a:r>
             <a:r>
               <a:rPr lang="it-IT" sz="2400" dirty="0"/>
-              <a:t> new and </a:t>
+              <a:t> new </a:t>
             </a:r>
             <a:r>
               <a:rPr lang="it-IT" sz="2400" dirty="0" err="1"/>
